--- a/Figures/Figure1.pptx
+++ b/Figures/Figure1.pptx
@@ -197,7 +197,7 @@
           <a:p>
             <a:fld id="{81C3831D-6582-214D-8DB6-DB700C4D073D}" type="datetimeFigureOut">
               <a:rPr lang="en-US" smtClean="0"/>
-              <a:t>10/23/25</a:t>
+              <a:t>7/21/26</a:t>
             </a:fld>
             <a:endParaRPr lang="en-US"/>
           </a:p>
@@ -685,7 +685,7 @@
           <a:p>
             <a:fld id="{0C1A98C3-708C-BF45-9C6D-989FFCF4A5FD}" type="datetimeFigureOut">
               <a:rPr lang="en-US" smtClean="0"/>
-              <a:t>10/23/25</a:t>
+              <a:t>7/21/26</a:t>
             </a:fld>
             <a:endParaRPr lang="en-US"/>
           </a:p>
@@ -855,7 +855,7 @@
           <a:p>
             <a:fld id="{0C1A98C3-708C-BF45-9C6D-989FFCF4A5FD}" type="datetimeFigureOut">
               <a:rPr lang="en-US" smtClean="0"/>
-              <a:t>10/23/25</a:t>
+              <a:t>7/21/26</a:t>
             </a:fld>
             <a:endParaRPr lang="en-US"/>
           </a:p>
@@ -1035,7 +1035,7 @@
           <a:p>
             <a:fld id="{0C1A98C3-708C-BF45-9C6D-989FFCF4A5FD}" type="datetimeFigureOut">
               <a:rPr lang="en-US" smtClean="0"/>
-              <a:t>10/23/25</a:t>
+              <a:t>7/21/26</a:t>
             </a:fld>
             <a:endParaRPr lang="en-US"/>
           </a:p>
@@ -1205,7 +1205,7 @@
           <a:p>
             <a:fld id="{0C1A98C3-708C-BF45-9C6D-989FFCF4A5FD}" type="datetimeFigureOut">
               <a:rPr lang="en-US" smtClean="0"/>
-              <a:t>10/23/25</a:t>
+              <a:t>7/21/26</a:t>
             </a:fld>
             <a:endParaRPr lang="en-US"/>
           </a:p>
@@ -1451,7 +1451,7 @@
           <a:p>
             <a:fld id="{0C1A98C3-708C-BF45-9C6D-989FFCF4A5FD}" type="datetimeFigureOut">
               <a:rPr lang="en-US" smtClean="0"/>
-              <a:t>10/23/25</a:t>
+              <a:t>7/21/26</a:t>
             </a:fld>
             <a:endParaRPr lang="en-US"/>
           </a:p>
@@ -1683,7 +1683,7 @@
           <a:p>
             <a:fld id="{0C1A98C3-708C-BF45-9C6D-989FFCF4A5FD}" type="datetimeFigureOut">
               <a:rPr lang="en-US" smtClean="0"/>
-              <a:t>10/23/25</a:t>
+              <a:t>7/21/26</a:t>
             </a:fld>
             <a:endParaRPr lang="en-US"/>
           </a:p>
@@ -2050,7 +2050,7 @@
           <a:p>
             <a:fld id="{0C1A98C3-708C-BF45-9C6D-989FFCF4A5FD}" type="datetimeFigureOut">
               <a:rPr lang="en-US" smtClean="0"/>
-              <a:t>10/23/25</a:t>
+              <a:t>7/21/26</a:t>
             </a:fld>
             <a:endParaRPr lang="en-US"/>
           </a:p>
@@ -2168,7 +2168,7 @@
           <a:p>
             <a:fld id="{0C1A98C3-708C-BF45-9C6D-989FFCF4A5FD}" type="datetimeFigureOut">
               <a:rPr lang="en-US" smtClean="0"/>
-              <a:t>10/23/25</a:t>
+              <a:t>7/21/26</a:t>
             </a:fld>
             <a:endParaRPr lang="en-US"/>
           </a:p>
@@ -2263,7 +2263,7 @@
           <a:p>
             <a:fld id="{0C1A98C3-708C-BF45-9C6D-989FFCF4A5FD}" type="datetimeFigureOut">
               <a:rPr lang="en-US" smtClean="0"/>
-              <a:t>10/23/25</a:t>
+              <a:t>7/21/26</a:t>
             </a:fld>
             <a:endParaRPr lang="en-US"/>
           </a:p>
@@ -2540,7 +2540,7 @@
           <a:p>
             <a:fld id="{0C1A98C3-708C-BF45-9C6D-989FFCF4A5FD}" type="datetimeFigureOut">
               <a:rPr lang="en-US" smtClean="0"/>
-              <a:t>10/23/25</a:t>
+              <a:t>7/21/26</a:t>
             </a:fld>
             <a:endParaRPr lang="en-US"/>
           </a:p>
@@ -2797,7 +2797,7 @@
           <a:p>
             <a:fld id="{0C1A98C3-708C-BF45-9C6D-989FFCF4A5FD}" type="datetimeFigureOut">
               <a:rPr lang="en-US" smtClean="0"/>
-              <a:t>10/23/25</a:t>
+              <a:t>7/21/26</a:t>
             </a:fld>
             <a:endParaRPr lang="en-US"/>
           </a:p>
@@ -3010,7 +3010,7 @@
           <a:p>
             <a:fld id="{0C1A98C3-708C-BF45-9C6D-989FFCF4A5FD}" type="datetimeFigureOut">
               <a:rPr lang="en-US" smtClean="0"/>
-              <a:t>10/23/25</a:t>
+              <a:t>7/21/26</a:t>
             </a:fld>
             <a:endParaRPr lang="en-US"/>
           </a:p>
@@ -3446,1819 +3446,6 @@
           </a:prstGeom>
         </p:spPr>
       </p:pic>
-      <p:grpSp>
-        <p:nvGrpSpPr>
-          <p:cNvPr id="95" name="Group 94">
-            <a:extLst>
-              <a:ext uri="{FF2B5EF4-FFF2-40B4-BE49-F238E27FC236}">
-                <a16:creationId xmlns:a16="http://schemas.microsoft.com/office/drawing/2014/main" id="{CC2B64CF-6183-1C96-8DD0-0E661761CF80}"/>
-              </a:ext>
-            </a:extLst>
-          </p:cNvPr>
-          <p:cNvGrpSpPr>
-            <a:grpSpLocks noChangeAspect="1"/>
-          </p:cNvGrpSpPr>
-          <p:nvPr/>
-        </p:nvGrpSpPr>
-        <p:grpSpPr>
-          <a:xfrm>
-            <a:off x="57343" y="74656"/>
-            <a:ext cx="3744394" cy="2551026"/>
-            <a:chOff x="2690393" y="107940"/>
-            <a:chExt cx="3744394" cy="2551026"/>
-          </a:xfrm>
-        </p:grpSpPr>
-        <p:grpSp>
-          <p:nvGrpSpPr>
-            <p:cNvPr id="90" name="Group 89">
-              <a:extLst>
-                <a:ext uri="{FF2B5EF4-FFF2-40B4-BE49-F238E27FC236}">
-                  <a16:creationId xmlns:a16="http://schemas.microsoft.com/office/drawing/2014/main" id="{1E21DC28-9166-C818-825E-4081DEED1AE5}"/>
-                </a:ext>
-              </a:extLst>
-            </p:cNvPr>
-            <p:cNvGrpSpPr/>
-            <p:nvPr/>
-          </p:nvGrpSpPr>
-          <p:grpSpPr>
-            <a:xfrm>
-              <a:off x="2690393" y="153834"/>
-              <a:ext cx="3744394" cy="2505132"/>
-              <a:chOff x="2690393" y="153834"/>
-              <a:chExt cx="3744394" cy="2505132"/>
-            </a:xfrm>
-          </p:grpSpPr>
-          <p:grpSp>
-            <p:nvGrpSpPr>
-              <p:cNvPr id="79" name="Group 78">
-                <a:extLst>
-                  <a:ext uri="{FF2B5EF4-FFF2-40B4-BE49-F238E27FC236}">
-                    <a16:creationId xmlns:a16="http://schemas.microsoft.com/office/drawing/2014/main" id="{C10CCC1F-90DE-9415-CD99-9FE3149899A7}"/>
-                  </a:ext>
-                </a:extLst>
-              </p:cNvPr>
-              <p:cNvGrpSpPr/>
-              <p:nvPr/>
-            </p:nvGrpSpPr>
-            <p:grpSpPr>
-              <a:xfrm>
-                <a:off x="2690393" y="153834"/>
-                <a:ext cx="3744394" cy="2505132"/>
-                <a:chOff x="2690393" y="153834"/>
-                <a:chExt cx="3744394" cy="2505132"/>
-              </a:xfrm>
-            </p:grpSpPr>
-            <p:grpSp>
-              <p:nvGrpSpPr>
-                <p:cNvPr id="76" name="Group 75">
-                  <a:extLst>
-                    <a:ext uri="{FF2B5EF4-FFF2-40B4-BE49-F238E27FC236}">
-                      <a16:creationId xmlns:a16="http://schemas.microsoft.com/office/drawing/2014/main" id="{F5F23627-79BD-4BC6-E01E-EF3B15D3156F}"/>
-                    </a:ext>
-                  </a:extLst>
-                </p:cNvPr>
-                <p:cNvGrpSpPr/>
-                <p:nvPr/>
-              </p:nvGrpSpPr>
-              <p:grpSpPr>
-                <a:xfrm>
-                  <a:off x="2690393" y="153834"/>
-                  <a:ext cx="3744394" cy="2505132"/>
-                  <a:chOff x="2690393" y="153834"/>
-                  <a:chExt cx="3744394" cy="2505132"/>
-                </a:xfrm>
-              </p:grpSpPr>
-              <p:grpSp>
-                <p:nvGrpSpPr>
-                  <p:cNvPr id="71" name="Group 70">
-                    <a:extLst>
-                      <a:ext uri="{FF2B5EF4-FFF2-40B4-BE49-F238E27FC236}">
-                        <a16:creationId xmlns:a16="http://schemas.microsoft.com/office/drawing/2014/main" id="{1428DA56-EABA-C0F1-D070-6E277FFDB3C5}"/>
-                      </a:ext>
-                    </a:extLst>
-                  </p:cNvPr>
-                  <p:cNvGrpSpPr/>
-                  <p:nvPr/>
-                </p:nvGrpSpPr>
-                <p:grpSpPr>
-                  <a:xfrm>
-                    <a:off x="2690393" y="153834"/>
-                    <a:ext cx="3744394" cy="2505132"/>
-                    <a:chOff x="2690393" y="153834"/>
-                    <a:chExt cx="3744394" cy="2505132"/>
-                  </a:xfrm>
-                </p:grpSpPr>
-                <p:grpSp>
-                  <p:nvGrpSpPr>
-                    <p:cNvPr id="68" name="Group 67">
-                      <a:extLst>
-                        <a:ext uri="{FF2B5EF4-FFF2-40B4-BE49-F238E27FC236}">
-                          <a16:creationId xmlns:a16="http://schemas.microsoft.com/office/drawing/2014/main" id="{93F17393-7E07-4BB5-D9AF-38478294432C}"/>
-                        </a:ext>
-                      </a:extLst>
-                    </p:cNvPr>
-                    <p:cNvGrpSpPr/>
-                    <p:nvPr/>
-                  </p:nvGrpSpPr>
-                  <p:grpSpPr>
-                    <a:xfrm>
-                      <a:off x="2690393" y="153834"/>
-                      <a:ext cx="3744394" cy="2505132"/>
-                      <a:chOff x="2690393" y="153834"/>
-                      <a:chExt cx="3744394" cy="2505132"/>
-                    </a:xfrm>
-                  </p:grpSpPr>
-                  <p:grpSp>
-                    <p:nvGrpSpPr>
-                      <p:cNvPr id="65" name="Group 64">
-                        <a:extLst>
-                          <a:ext uri="{FF2B5EF4-FFF2-40B4-BE49-F238E27FC236}">
-                            <a16:creationId xmlns:a16="http://schemas.microsoft.com/office/drawing/2014/main" id="{CABCBF5E-B47F-83C5-94C0-DDFB2CEA3139}"/>
-                          </a:ext>
-                        </a:extLst>
-                      </p:cNvPr>
-                      <p:cNvGrpSpPr/>
-                      <p:nvPr/>
-                    </p:nvGrpSpPr>
-                    <p:grpSpPr>
-                      <a:xfrm>
-                        <a:off x="2690393" y="153834"/>
-                        <a:ext cx="3744394" cy="2505132"/>
-                        <a:chOff x="2690393" y="153834"/>
-                        <a:chExt cx="3744394" cy="2505132"/>
-                      </a:xfrm>
-                    </p:grpSpPr>
-                    <p:grpSp>
-                      <p:nvGrpSpPr>
-                        <p:cNvPr id="62" name="Group 61">
-                          <a:extLst>
-                            <a:ext uri="{FF2B5EF4-FFF2-40B4-BE49-F238E27FC236}">
-                              <a16:creationId xmlns:a16="http://schemas.microsoft.com/office/drawing/2014/main" id="{13F0EF30-B7C5-C0FC-C6E5-D35A93911118}"/>
-                            </a:ext>
-                          </a:extLst>
-                        </p:cNvPr>
-                        <p:cNvGrpSpPr/>
-                        <p:nvPr/>
-                      </p:nvGrpSpPr>
-                      <p:grpSpPr>
-                        <a:xfrm>
-                          <a:off x="2690393" y="153834"/>
-                          <a:ext cx="3744394" cy="2505132"/>
-                          <a:chOff x="2690393" y="153834"/>
-                          <a:chExt cx="3744394" cy="2505132"/>
-                        </a:xfrm>
-                      </p:grpSpPr>
-                      <p:grpSp>
-                        <p:nvGrpSpPr>
-                          <p:cNvPr id="59" name="Group 58">
-                            <a:extLst>
-                              <a:ext uri="{FF2B5EF4-FFF2-40B4-BE49-F238E27FC236}">
-                                <a16:creationId xmlns:a16="http://schemas.microsoft.com/office/drawing/2014/main" id="{676F3493-7138-8FA8-0F17-7D94574AA2D8}"/>
-                              </a:ext>
-                            </a:extLst>
-                          </p:cNvPr>
-                          <p:cNvGrpSpPr/>
-                          <p:nvPr/>
-                        </p:nvGrpSpPr>
-                        <p:grpSpPr>
-                          <a:xfrm>
-                            <a:off x="2690393" y="153834"/>
-                            <a:ext cx="3744394" cy="2505132"/>
-                            <a:chOff x="2690393" y="153834"/>
-                            <a:chExt cx="3744394" cy="2505132"/>
-                          </a:xfrm>
-                        </p:grpSpPr>
-                        <p:grpSp>
-                          <p:nvGrpSpPr>
-                            <p:cNvPr id="56" name="Group 55">
-                              <a:extLst>
-                                <a:ext uri="{FF2B5EF4-FFF2-40B4-BE49-F238E27FC236}">
-                                  <a16:creationId xmlns:a16="http://schemas.microsoft.com/office/drawing/2014/main" id="{A85C6D24-CD9A-25A9-7815-2BED92D0FDDD}"/>
-                                </a:ext>
-                              </a:extLst>
-                            </p:cNvPr>
-                            <p:cNvGrpSpPr/>
-                            <p:nvPr/>
-                          </p:nvGrpSpPr>
-                          <p:grpSpPr>
-                            <a:xfrm>
-                              <a:off x="2690393" y="153834"/>
-                              <a:ext cx="3744394" cy="2505132"/>
-                              <a:chOff x="2690393" y="153834"/>
-                              <a:chExt cx="3744394" cy="2505132"/>
-                            </a:xfrm>
-                          </p:grpSpPr>
-                          <p:grpSp>
-                            <p:nvGrpSpPr>
-                              <p:cNvPr id="53" name="Group 52">
-                                <a:extLst>
-                                  <a:ext uri="{FF2B5EF4-FFF2-40B4-BE49-F238E27FC236}">
-                                    <a16:creationId xmlns:a16="http://schemas.microsoft.com/office/drawing/2014/main" id="{349A9255-A6DB-71F3-860D-8518ED6729A0}"/>
-                                  </a:ext>
-                                </a:extLst>
-                              </p:cNvPr>
-                              <p:cNvGrpSpPr/>
-                              <p:nvPr/>
-                            </p:nvGrpSpPr>
-                            <p:grpSpPr>
-                              <a:xfrm>
-                                <a:off x="2690393" y="153834"/>
-                                <a:ext cx="3744394" cy="2505132"/>
-                                <a:chOff x="2690393" y="153834"/>
-                                <a:chExt cx="3744394" cy="2505132"/>
-                              </a:xfrm>
-                            </p:grpSpPr>
-                            <p:grpSp>
-                              <p:nvGrpSpPr>
-                                <p:cNvPr id="50" name="Group 49">
-                                  <a:extLst>
-                                    <a:ext uri="{FF2B5EF4-FFF2-40B4-BE49-F238E27FC236}">
-                                      <a16:creationId xmlns:a16="http://schemas.microsoft.com/office/drawing/2014/main" id="{AB78A8E9-1184-7AE9-0056-E0425A3FEFB8}"/>
-                                    </a:ext>
-                                  </a:extLst>
-                                </p:cNvPr>
-                                <p:cNvGrpSpPr/>
-                                <p:nvPr/>
-                              </p:nvGrpSpPr>
-                              <p:grpSpPr>
-                                <a:xfrm>
-                                  <a:off x="2690393" y="153834"/>
-                                  <a:ext cx="3744394" cy="2505132"/>
-                                  <a:chOff x="2690393" y="153834"/>
-                                  <a:chExt cx="3744394" cy="2505132"/>
-                                </a:xfrm>
-                              </p:grpSpPr>
-                              <p:grpSp>
-                                <p:nvGrpSpPr>
-                                  <p:cNvPr id="47" name="Group 46">
-                                    <a:extLst>
-                                      <a:ext uri="{FF2B5EF4-FFF2-40B4-BE49-F238E27FC236}">
-                                        <a16:creationId xmlns:a16="http://schemas.microsoft.com/office/drawing/2014/main" id="{8F762D33-C2E1-3D84-1664-16EA9D13A13E}"/>
-                                      </a:ext>
-                                    </a:extLst>
-                                  </p:cNvPr>
-                                  <p:cNvGrpSpPr/>
-                                  <p:nvPr/>
-                                </p:nvGrpSpPr>
-                                <p:grpSpPr>
-                                  <a:xfrm>
-                                    <a:off x="2690393" y="153834"/>
-                                    <a:ext cx="3744394" cy="2505132"/>
-                                    <a:chOff x="2690393" y="153834"/>
-                                    <a:chExt cx="3744394" cy="2505132"/>
-                                  </a:xfrm>
-                                </p:grpSpPr>
-                                <p:grpSp>
-                                  <p:nvGrpSpPr>
-                                    <p:cNvPr id="44" name="Group 43">
-                                      <a:extLst>
-                                        <a:ext uri="{FF2B5EF4-FFF2-40B4-BE49-F238E27FC236}">
-                                          <a16:creationId xmlns:a16="http://schemas.microsoft.com/office/drawing/2014/main" id="{35DE4F5C-B521-EDCB-75D9-75E21CDE07D1}"/>
-                                        </a:ext>
-                                      </a:extLst>
-                                    </p:cNvPr>
-                                    <p:cNvGrpSpPr/>
-                                    <p:nvPr/>
-                                  </p:nvGrpSpPr>
-                                  <p:grpSpPr>
-                                    <a:xfrm>
-                                      <a:off x="2690393" y="153834"/>
-                                      <a:ext cx="3744394" cy="2505132"/>
-                                      <a:chOff x="2690393" y="153834"/>
-                                      <a:chExt cx="3744394" cy="2505132"/>
-                                    </a:xfrm>
-                                  </p:grpSpPr>
-                                  <p:grpSp>
-                                    <p:nvGrpSpPr>
-                                      <p:cNvPr id="40" name="Group 39">
-                                        <a:extLst>
-                                          <a:ext uri="{FF2B5EF4-FFF2-40B4-BE49-F238E27FC236}">
-                                            <a16:creationId xmlns:a16="http://schemas.microsoft.com/office/drawing/2014/main" id="{0C003ACB-F89C-72C5-8A2C-5D98C4ADFA66}"/>
-                                          </a:ext>
-                                        </a:extLst>
-                                      </p:cNvPr>
-                                      <p:cNvGrpSpPr/>
-                                      <p:nvPr/>
-                                    </p:nvGrpSpPr>
-                                    <p:grpSpPr>
-                                      <a:xfrm>
-                                        <a:off x="2690393" y="153834"/>
-                                        <a:ext cx="3744394" cy="2505132"/>
-                                        <a:chOff x="2690393" y="153834"/>
-                                        <a:chExt cx="3744394" cy="2505132"/>
-                                      </a:xfrm>
-                                    </p:grpSpPr>
-                                    <p:grpSp>
-                                      <p:nvGrpSpPr>
-                                        <p:cNvPr id="37" name="Group 36">
-                                          <a:extLst>
-                                            <a:ext uri="{FF2B5EF4-FFF2-40B4-BE49-F238E27FC236}">
-                                              <a16:creationId xmlns:a16="http://schemas.microsoft.com/office/drawing/2014/main" id="{2B6E0933-72DC-A05F-24FC-138955452616}"/>
-                                            </a:ext>
-                                          </a:extLst>
-                                        </p:cNvPr>
-                                        <p:cNvGrpSpPr/>
-                                        <p:nvPr/>
-                                      </p:nvGrpSpPr>
-                                      <p:grpSpPr>
-                                        <a:xfrm>
-                                          <a:off x="2690393" y="153834"/>
-                                          <a:ext cx="3744394" cy="2505132"/>
-                                          <a:chOff x="2735781" y="97392"/>
-                                          <a:chExt cx="3744394" cy="2505132"/>
-                                        </a:xfrm>
-                                      </p:grpSpPr>
-                                      <p:pic>
-                                        <p:nvPicPr>
-                                          <p:cNvPr id="3" name="Picture 2">
-                                            <a:extLst>
-                                              <a:ext uri="{FF2B5EF4-FFF2-40B4-BE49-F238E27FC236}">
-                                                <a16:creationId xmlns:a16="http://schemas.microsoft.com/office/drawing/2014/main" id="{7024261C-88CC-476B-88DF-FC06562D23FE}"/>
-                                              </a:ext>
-                                            </a:extLst>
-                                          </p:cNvPr>
-                                          <p:cNvPicPr>
-                                            <a:picLocks noChangeAspect="1"/>
-                                          </p:cNvPicPr>
-                                          <p:nvPr/>
-                                        </p:nvPicPr>
-                                        <p:blipFill>
-                                          <a:blip r:embed="rId4"/>
-                                          <a:srcRect l="3808" t="3948" r="4376" b="3963"/>
-                                          <a:stretch/>
-                                        </p:blipFill>
-                                        <p:spPr>
-                                          <a:xfrm>
-                                            <a:off x="2735781" y="97392"/>
-                                            <a:ext cx="3744394" cy="2505132"/>
-                                          </a:xfrm>
-                                          <a:prstGeom prst="rect">
-                                            <a:avLst/>
-                                          </a:prstGeom>
-                                        </p:spPr>
-                                      </p:pic>
-                                      <p:pic>
-                                        <p:nvPicPr>
-                                          <p:cNvPr id="36" name="Picture 35">
-                                            <a:extLst>
-                                              <a:ext uri="{FF2B5EF4-FFF2-40B4-BE49-F238E27FC236}">
-                                                <a16:creationId xmlns:a16="http://schemas.microsoft.com/office/drawing/2014/main" id="{415CA38F-A93A-E531-BC8E-4260E67101C9}"/>
-                                              </a:ext>
-                                            </a:extLst>
-                                          </p:cNvPr>
-                                          <p:cNvPicPr>
-                                            <a:picLocks/>
-                                          </p:cNvPicPr>
-                                          <p:nvPr/>
-                                        </p:nvPicPr>
-                                        <p:blipFill>
-                                          <a:blip r:embed="rId5"/>
-                                          <a:stretch>
-                                            <a:fillRect/>
-                                          </a:stretch>
-                                        </p:blipFill>
-                                        <p:spPr>
-                                          <a:xfrm flipV="1">
-                                            <a:off x="5695950" y="278131"/>
-                                            <a:ext cx="66676" cy="45719"/>
-                                          </a:xfrm>
-                                          <a:prstGeom prst="rect">
-                                            <a:avLst/>
-                                          </a:prstGeom>
-                                        </p:spPr>
-                                      </p:pic>
-                                    </p:grpSp>
-                                    <p:pic>
-                                      <p:nvPicPr>
-                                        <p:cNvPr id="39" name="Picture 38">
-                                          <a:extLst>
-                                            <a:ext uri="{FF2B5EF4-FFF2-40B4-BE49-F238E27FC236}">
-                                              <a16:creationId xmlns:a16="http://schemas.microsoft.com/office/drawing/2014/main" id="{2DC9B289-F064-93A9-9331-A8F9036A4CD1}"/>
-                                            </a:ext>
-                                          </a:extLst>
-                                        </p:cNvPr>
-                                        <p:cNvPicPr>
-                                          <a:picLocks/>
-                                        </p:cNvPicPr>
-                                        <p:nvPr/>
-                                      </p:nvPicPr>
-                                      <p:blipFill>
-                                        <a:blip r:embed="rId6"/>
-                                        <a:stretch>
-                                          <a:fillRect/>
-                                        </a:stretch>
-                                      </p:blipFill>
-                                      <p:spPr>
-                                        <a:xfrm>
-                                          <a:off x="5646449" y="445856"/>
-                                          <a:ext cx="66676" cy="45719"/>
-                                        </a:xfrm>
-                                        <a:prstGeom prst="rect">
-                                          <a:avLst/>
-                                        </a:prstGeom>
-                                      </p:spPr>
-                                    </p:pic>
-                                  </p:grpSp>
-                                  <p:pic>
-                                    <p:nvPicPr>
-                                      <p:cNvPr id="43" name="Picture 42">
-                                        <a:extLst>
-                                          <a:ext uri="{FF2B5EF4-FFF2-40B4-BE49-F238E27FC236}">
-                                            <a16:creationId xmlns:a16="http://schemas.microsoft.com/office/drawing/2014/main" id="{5A429241-73DC-E4A4-E9F8-476FA0BB3D2E}"/>
-                                          </a:ext>
-                                        </a:extLst>
-                                      </p:cNvPr>
-                                      <p:cNvPicPr>
-                                        <a:picLocks/>
-                                      </p:cNvPicPr>
-                                      <p:nvPr/>
-                                    </p:nvPicPr>
-                                    <p:blipFill>
-                                      <a:blip r:embed="rId7"/>
-                                      <a:stretch>
-                                        <a:fillRect/>
-                                      </a:stretch>
-                                    </p:blipFill>
-                                    <p:spPr>
-                                      <a:xfrm>
-                                        <a:off x="5652832" y="557139"/>
-                                        <a:ext cx="60293" cy="45719"/>
-                                      </a:xfrm>
-                                      <a:prstGeom prst="rect">
-                                        <a:avLst/>
-                                      </a:prstGeom>
-                                    </p:spPr>
-                                  </p:pic>
-                                </p:grpSp>
-                                <p:pic>
-                                  <p:nvPicPr>
-                                    <p:cNvPr id="46" name="Picture 45">
-                                      <a:extLst>
-                                        <a:ext uri="{FF2B5EF4-FFF2-40B4-BE49-F238E27FC236}">
-                                          <a16:creationId xmlns:a16="http://schemas.microsoft.com/office/drawing/2014/main" id="{5EBC5F4B-512B-30C0-88E8-B8DD7209950E}"/>
-                                        </a:ext>
-                                      </a:extLst>
-                                    </p:cNvPr>
-                                    <p:cNvPicPr>
-                                      <a:picLocks/>
-                                    </p:cNvPicPr>
-                                    <p:nvPr/>
-                                  </p:nvPicPr>
-                                  <p:blipFill>
-                                    <a:blip r:embed="rId8"/>
-                                    <a:stretch>
-                                      <a:fillRect/>
-                                    </a:stretch>
-                                  </p:blipFill>
-                                  <p:spPr>
-                                    <a:xfrm>
-                                      <a:off x="5648773" y="672112"/>
-                                      <a:ext cx="60294" cy="45719"/>
-                                    </a:xfrm>
-                                    <a:prstGeom prst="rect">
-                                      <a:avLst/>
-                                    </a:prstGeom>
-                                  </p:spPr>
-                                </p:pic>
-                              </p:grpSp>
-                              <p:pic>
-                                <p:nvPicPr>
-                                  <p:cNvPr id="49" name="Picture 48">
-                                    <a:extLst>
-                                      <a:ext uri="{FF2B5EF4-FFF2-40B4-BE49-F238E27FC236}">
-                                        <a16:creationId xmlns:a16="http://schemas.microsoft.com/office/drawing/2014/main" id="{CB912E20-5D58-3D42-8C48-FD13BDE972E3}"/>
-                                      </a:ext>
-                                    </a:extLst>
-                                  </p:cNvPr>
-                                  <p:cNvPicPr>
-                                    <a:picLocks/>
-                                  </p:cNvPicPr>
-                                  <p:nvPr/>
-                                </p:nvPicPr>
-                                <p:blipFill>
-                                  <a:blip r:embed="rId9"/>
-                                  <a:stretch>
-                                    <a:fillRect/>
-                                  </a:stretch>
-                                </p:blipFill>
-                                <p:spPr>
-                                  <a:xfrm>
-                                    <a:off x="5652832" y="777073"/>
-                                    <a:ext cx="64406" cy="45719"/>
-                                  </a:xfrm>
-                                  <a:prstGeom prst="rect">
-                                    <a:avLst/>
-                                  </a:prstGeom>
-                                </p:spPr>
-                              </p:pic>
-                            </p:grpSp>
-                            <p:pic>
-                              <p:nvPicPr>
-                                <p:cNvPr id="52" name="Picture 51">
-                                  <a:extLst>
-                                    <a:ext uri="{FF2B5EF4-FFF2-40B4-BE49-F238E27FC236}">
-                                      <a16:creationId xmlns:a16="http://schemas.microsoft.com/office/drawing/2014/main" id="{77F6E0CF-F61C-BFD0-E7B9-2BC2BCF6B176}"/>
-                                    </a:ext>
-                                  </a:extLst>
-                                </p:cNvPr>
-                                <p:cNvPicPr>
-                                  <a:picLocks/>
-                                </p:cNvPicPr>
-                                <p:nvPr/>
-                              </p:nvPicPr>
-                              <p:blipFill>
-                                <a:blip r:embed="rId10"/>
-                                <a:stretch>
-                                  <a:fillRect/>
-                                </a:stretch>
-                              </p:blipFill>
-                              <p:spPr>
-                                <a:xfrm flipV="1">
-                                  <a:off x="5652831" y="888926"/>
-                                  <a:ext cx="64406" cy="45721"/>
-                                </a:xfrm>
-                                <a:prstGeom prst="rect">
-                                  <a:avLst/>
-                                </a:prstGeom>
-                              </p:spPr>
-                            </p:pic>
-                          </p:grpSp>
-                          <p:pic>
-                            <p:nvPicPr>
-                              <p:cNvPr id="55" name="Picture 54">
-                                <a:extLst>
-                                  <a:ext uri="{FF2B5EF4-FFF2-40B4-BE49-F238E27FC236}">
-                                    <a16:creationId xmlns:a16="http://schemas.microsoft.com/office/drawing/2014/main" id="{CC21B3D7-A816-E026-E9DA-89FA0D910EBC}"/>
-                                  </a:ext>
-                                </a:extLst>
-                              </p:cNvPr>
-                              <p:cNvPicPr>
-                                <a:picLocks/>
-                              </p:cNvPicPr>
-                              <p:nvPr/>
-                            </p:nvPicPr>
-                            <p:blipFill>
-                              <a:blip r:embed="rId11"/>
-                              <a:stretch>
-                                <a:fillRect/>
-                              </a:stretch>
-                            </p:blipFill>
-                            <p:spPr>
-                              <a:xfrm>
-                                <a:off x="5653807" y="998451"/>
-                                <a:ext cx="63430" cy="52352"/>
-                              </a:xfrm>
-                              <a:prstGeom prst="rect">
-                                <a:avLst/>
-                              </a:prstGeom>
-                            </p:spPr>
-                          </p:pic>
-                        </p:grpSp>
-                        <p:pic>
-                          <p:nvPicPr>
-                            <p:cNvPr id="58" name="Picture 57">
-                              <a:extLst>
-                                <a:ext uri="{FF2B5EF4-FFF2-40B4-BE49-F238E27FC236}">
-                                  <a16:creationId xmlns:a16="http://schemas.microsoft.com/office/drawing/2014/main" id="{F9D6ACD6-3D5B-2813-94B9-2A6DB49B7A85}"/>
-                                </a:ext>
-                              </a:extLst>
-                            </p:cNvPr>
-                            <p:cNvPicPr>
-                              <a:picLocks/>
-                            </p:cNvPicPr>
-                            <p:nvPr/>
-                          </p:nvPicPr>
-                          <p:blipFill>
-                            <a:blip r:embed="rId12"/>
-                            <a:stretch>
-                              <a:fillRect/>
-                            </a:stretch>
-                          </p:blipFill>
-                          <p:spPr>
-                            <a:xfrm>
-                              <a:off x="5649493" y="1108457"/>
-                              <a:ext cx="68400" cy="57600"/>
-                            </a:xfrm>
-                            <a:prstGeom prst="rect">
-                              <a:avLst/>
-                            </a:prstGeom>
-                          </p:spPr>
-                        </p:pic>
-                      </p:grpSp>
-                      <p:pic>
-                        <p:nvPicPr>
-                          <p:cNvPr id="61" name="Picture 60">
-                            <a:extLst>
-                              <a:ext uri="{FF2B5EF4-FFF2-40B4-BE49-F238E27FC236}">
-                                <a16:creationId xmlns:a16="http://schemas.microsoft.com/office/drawing/2014/main" id="{50EA2C66-7B26-CD5B-2104-3CAF0A5C3929}"/>
-                              </a:ext>
-                            </a:extLst>
-                          </p:cNvPr>
-                          <p:cNvPicPr>
-                            <a:picLocks/>
-                          </p:cNvPicPr>
-                          <p:nvPr/>
-                        </p:nvPicPr>
-                        <p:blipFill>
-                          <a:blip r:embed="rId13"/>
-                          <a:stretch>
-                            <a:fillRect/>
-                          </a:stretch>
-                        </p:blipFill>
-                        <p:spPr>
-                          <a:xfrm>
-                            <a:off x="5652830" y="1217218"/>
-                            <a:ext cx="64407" cy="54834"/>
-                          </a:xfrm>
-                          <a:prstGeom prst="rect">
-                            <a:avLst/>
-                          </a:prstGeom>
-                        </p:spPr>
-                      </p:pic>
-                    </p:grpSp>
-                    <p:pic>
-                      <p:nvPicPr>
-                        <p:cNvPr id="64" name="Picture 63" descr="A green square with white dots&#10;&#10;AI-generated content may be incorrect.">
-                          <a:extLst>
-                            <a:ext uri="{FF2B5EF4-FFF2-40B4-BE49-F238E27FC236}">
-                              <a16:creationId xmlns:a16="http://schemas.microsoft.com/office/drawing/2014/main" id="{D4F12640-CF50-BB22-2CC7-B5E118FFA963}"/>
-                            </a:ext>
-                          </a:extLst>
-                        </p:cNvPr>
-                        <p:cNvPicPr>
-                          <a:picLocks/>
-                        </p:cNvPicPr>
-                        <p:nvPr/>
-                      </p:nvPicPr>
-                      <p:blipFill>
-                        <a:blip r:embed="rId14"/>
-                        <a:stretch>
-                          <a:fillRect/>
-                        </a:stretch>
-                      </p:blipFill>
-                      <p:spPr>
-                        <a:xfrm flipH="1">
-                          <a:off x="5650495" y="1326550"/>
-                          <a:ext cx="72000" cy="54834"/>
-                        </a:xfrm>
-                        <a:prstGeom prst="rect">
-                          <a:avLst/>
-                        </a:prstGeom>
-                      </p:spPr>
-                    </p:pic>
-                  </p:grpSp>
-                  <p:pic>
-                    <p:nvPicPr>
-                      <p:cNvPr id="67" name="Picture 66" descr="A green square with white dots&#10;&#10;AI-generated content may be incorrect.">
-                        <a:extLst>
-                          <a:ext uri="{FF2B5EF4-FFF2-40B4-BE49-F238E27FC236}">
-                            <a16:creationId xmlns:a16="http://schemas.microsoft.com/office/drawing/2014/main" id="{53D654A5-DAE1-28CA-990E-B21E5F8696DC}"/>
-                          </a:ext>
-                        </a:extLst>
-                      </p:cNvPr>
-                      <p:cNvPicPr>
-                        <a:picLocks/>
-                      </p:cNvPicPr>
-                      <p:nvPr/>
-                    </p:nvPicPr>
-                    <p:blipFill>
-                      <a:blip r:embed="rId15"/>
-                      <a:stretch>
-                        <a:fillRect/>
-                      </a:stretch>
-                    </p:blipFill>
-                    <p:spPr>
-                      <a:xfrm>
-                        <a:off x="5652829" y="1439290"/>
-                        <a:ext cx="64800" cy="54834"/>
-                      </a:xfrm>
-                      <a:prstGeom prst="rect">
-                        <a:avLst/>
-                      </a:prstGeom>
-                    </p:spPr>
-                  </p:pic>
-                </p:grpSp>
-                <p:pic>
-                  <p:nvPicPr>
-                    <p:cNvPr id="70" name="Picture 69" descr="A yellow square with black dots&#10;&#10;AI-generated content may be incorrect.">
-                      <a:extLst>
-                        <a:ext uri="{FF2B5EF4-FFF2-40B4-BE49-F238E27FC236}">
-                          <a16:creationId xmlns:a16="http://schemas.microsoft.com/office/drawing/2014/main" id="{9340D50E-63CD-258D-D6E4-1318A3231AF8}"/>
-                        </a:ext>
-                      </a:extLst>
-                    </p:cNvPr>
-                    <p:cNvPicPr>
-                      <a:picLocks/>
-                    </p:cNvPicPr>
-                    <p:nvPr/>
-                  </p:nvPicPr>
-                  <p:blipFill>
-                    <a:blip r:embed="rId16"/>
-                    <a:stretch>
-                      <a:fillRect/>
-                    </a:stretch>
-                  </p:blipFill>
-                  <p:spPr>
-                    <a:xfrm>
-                      <a:off x="5652829" y="1542096"/>
-                      <a:ext cx="64408" cy="66326"/>
-                    </a:xfrm>
-                    <a:prstGeom prst="rect">
-                      <a:avLst/>
-                    </a:prstGeom>
-                  </p:spPr>
-                </p:pic>
-              </p:grpSp>
-              <p:pic>
-                <p:nvPicPr>
-                  <p:cNvPr id="73" name="Picture 72" descr="A yellow square with black dots&#10;&#10;AI-generated content may be incorrect.">
-                    <a:extLst>
-                      <a:ext uri="{FF2B5EF4-FFF2-40B4-BE49-F238E27FC236}">
-                        <a16:creationId xmlns:a16="http://schemas.microsoft.com/office/drawing/2014/main" id="{7C6A4E3C-B587-9B5A-1864-567E1B89B483}"/>
-                      </a:ext>
-                    </a:extLst>
-                  </p:cNvPr>
-                  <p:cNvPicPr>
-                    <a:picLocks/>
-                  </p:cNvPicPr>
-                  <p:nvPr/>
-                </p:nvPicPr>
-                <p:blipFill>
-                  <a:blip r:embed="rId17"/>
-                  <a:stretch>
-                    <a:fillRect/>
-                  </a:stretch>
-                </p:blipFill>
-                <p:spPr>
-                  <a:xfrm flipH="1">
-                    <a:off x="5652829" y="1660949"/>
-                    <a:ext cx="64408" cy="45719"/>
-                  </a:xfrm>
-                  <a:prstGeom prst="rect">
-                    <a:avLst/>
-                  </a:prstGeom>
-                </p:spPr>
-              </p:pic>
-              <p:pic>
-                <p:nvPicPr>
-                  <p:cNvPr id="75" name="Picture 74" descr="A close up of an orange&#10;&#10;AI-generated content may be incorrect.">
-                    <a:extLst>
-                      <a:ext uri="{FF2B5EF4-FFF2-40B4-BE49-F238E27FC236}">
-                        <a16:creationId xmlns:a16="http://schemas.microsoft.com/office/drawing/2014/main" id="{30BC84D5-720B-60F5-ADB2-C712302C8561}"/>
-                      </a:ext>
-                    </a:extLst>
-                  </p:cNvPr>
-                  <p:cNvPicPr>
-                    <a:picLocks/>
-                  </p:cNvPicPr>
-                  <p:nvPr/>
-                </p:nvPicPr>
-                <p:blipFill>
-                  <a:blip r:embed="rId18"/>
-                  <a:stretch>
-                    <a:fillRect/>
-                  </a:stretch>
-                </p:blipFill>
-                <p:spPr>
-                  <a:xfrm>
-                    <a:off x="5649261" y="1778600"/>
-                    <a:ext cx="67975" cy="45721"/>
-                  </a:xfrm>
-                  <a:prstGeom prst="rect">
-                    <a:avLst/>
-                  </a:prstGeom>
-                </p:spPr>
-              </p:pic>
-            </p:grpSp>
-            <p:pic>
-              <p:nvPicPr>
-                <p:cNvPr id="78" name="Picture 77" descr="A red square with white dots&#10;&#10;AI-generated content may be incorrect.">
-                  <a:extLst>
-                    <a:ext uri="{FF2B5EF4-FFF2-40B4-BE49-F238E27FC236}">
-                      <a16:creationId xmlns:a16="http://schemas.microsoft.com/office/drawing/2014/main" id="{BDEF33ED-59B6-09FC-9315-6EB45C47ECE4}"/>
-                    </a:ext>
-                  </a:extLst>
-                </p:cNvPr>
-                <p:cNvPicPr>
-                  <a:picLocks/>
-                </p:cNvPicPr>
-                <p:nvPr/>
-              </p:nvPicPr>
-              <p:blipFill>
-                <a:blip r:embed="rId19"/>
-                <a:stretch>
-                  <a:fillRect/>
-                </a:stretch>
-              </p:blipFill>
-              <p:spPr>
-                <a:xfrm>
-                  <a:off x="5649653" y="1882964"/>
-                  <a:ext cx="74567" cy="45719"/>
-                </a:xfrm>
-                <a:prstGeom prst="rect">
-                  <a:avLst/>
-                </a:prstGeom>
-              </p:spPr>
-            </p:pic>
-          </p:grpSp>
-          <p:pic>
-            <p:nvPicPr>
-              <p:cNvPr id="81" name="Picture 80" descr="A red square with a white border&#10;&#10;AI-generated content may be incorrect.">
-                <a:extLst>
-                  <a:ext uri="{FF2B5EF4-FFF2-40B4-BE49-F238E27FC236}">
-                    <a16:creationId xmlns:a16="http://schemas.microsoft.com/office/drawing/2014/main" id="{E5691C5E-C4FD-760F-EE62-8B2E294DA9CF}"/>
-                  </a:ext>
-                </a:extLst>
-              </p:cNvPr>
-              <p:cNvPicPr>
-                <a:picLocks/>
-              </p:cNvPicPr>
-              <p:nvPr/>
-            </p:nvPicPr>
-            <p:blipFill>
-              <a:blip r:embed="rId20"/>
-              <a:stretch>
-                <a:fillRect/>
-              </a:stretch>
-            </p:blipFill>
-            <p:spPr>
-              <a:xfrm>
-                <a:off x="5649261" y="1988959"/>
-                <a:ext cx="67975" cy="57613"/>
-              </a:xfrm>
-              <a:prstGeom prst="rect">
-                <a:avLst/>
-              </a:prstGeom>
-            </p:spPr>
-          </p:pic>
-          <p:pic>
-            <p:nvPicPr>
-              <p:cNvPr id="83" name="Picture 82" descr="A close up of a red square&#10;&#10;AI-generated content may be incorrect.">
-                <a:extLst>
-                  <a:ext uri="{FF2B5EF4-FFF2-40B4-BE49-F238E27FC236}">
-                    <a16:creationId xmlns:a16="http://schemas.microsoft.com/office/drawing/2014/main" id="{BE0203F2-59C0-3F0F-DEDC-CCE769A7111E}"/>
-                  </a:ext>
-                </a:extLst>
-              </p:cNvPr>
-              <p:cNvPicPr>
-                <a:picLocks/>
-              </p:cNvPicPr>
-              <p:nvPr/>
-            </p:nvPicPr>
-            <p:blipFill>
-              <a:blip r:embed="rId21"/>
-              <a:stretch>
-                <a:fillRect/>
-              </a:stretch>
-            </p:blipFill>
-            <p:spPr>
-              <a:xfrm>
-                <a:off x="5649653" y="2109248"/>
-                <a:ext cx="71391" cy="47114"/>
-              </a:xfrm>
-              <a:prstGeom prst="rect">
-                <a:avLst/>
-              </a:prstGeom>
-            </p:spPr>
-          </p:pic>
-          <p:pic>
-            <p:nvPicPr>
-              <p:cNvPr id="85" name="Picture 84" descr="A close up of a orange&#10;&#10;AI-generated content may be incorrect.">
-                <a:extLst>
-                  <a:ext uri="{FF2B5EF4-FFF2-40B4-BE49-F238E27FC236}">
-                    <a16:creationId xmlns:a16="http://schemas.microsoft.com/office/drawing/2014/main" id="{66D49150-9CD4-6148-E821-35F5D5A40145}"/>
-                  </a:ext>
-                </a:extLst>
-              </p:cNvPr>
-              <p:cNvPicPr>
-                <a:picLocks/>
-              </p:cNvPicPr>
-              <p:nvPr/>
-            </p:nvPicPr>
-            <p:blipFill>
-              <a:blip r:embed="rId22"/>
-              <a:stretch>
-                <a:fillRect/>
-              </a:stretch>
-            </p:blipFill>
-            <p:spPr>
-              <a:xfrm>
-                <a:off x="5646449" y="2211938"/>
-                <a:ext cx="74567" cy="45719"/>
-              </a:xfrm>
-              <a:prstGeom prst="rect">
-                <a:avLst/>
-              </a:prstGeom>
-            </p:spPr>
-          </p:pic>
-          <p:pic>
-            <p:nvPicPr>
-              <p:cNvPr id="87" name="Picture 86" descr="A red square with a white stripe&#10;&#10;AI-generated content may be incorrect.">
-                <a:extLst>
-                  <a:ext uri="{FF2B5EF4-FFF2-40B4-BE49-F238E27FC236}">
-                    <a16:creationId xmlns:a16="http://schemas.microsoft.com/office/drawing/2014/main" id="{EB29C4B9-9DDB-F50A-8E62-A4CEEF4A4319}"/>
-                  </a:ext>
-                </a:extLst>
-              </p:cNvPr>
-              <p:cNvPicPr>
-                <a:picLocks/>
-              </p:cNvPicPr>
-              <p:nvPr/>
-            </p:nvPicPr>
-            <p:blipFill>
-              <a:blip r:embed="rId23"/>
-              <a:stretch>
-                <a:fillRect/>
-              </a:stretch>
-            </p:blipFill>
-            <p:spPr>
-              <a:xfrm>
-                <a:off x="5649260" y="2323792"/>
-                <a:ext cx="67975" cy="50887"/>
-              </a:xfrm>
-              <a:prstGeom prst="rect">
-                <a:avLst/>
-              </a:prstGeom>
-            </p:spPr>
-          </p:pic>
-          <p:pic>
-            <p:nvPicPr>
-              <p:cNvPr id="89" name="Picture 88" descr="A red square with a white border&#10;&#10;AI-generated content may be incorrect.">
-                <a:extLst>
-                  <a:ext uri="{FF2B5EF4-FFF2-40B4-BE49-F238E27FC236}">
-                    <a16:creationId xmlns:a16="http://schemas.microsoft.com/office/drawing/2014/main" id="{46350AD5-DE2D-4087-D271-316EC8A5C4BF}"/>
-                  </a:ext>
-                </a:extLst>
-              </p:cNvPr>
-              <p:cNvPicPr>
-                <a:picLocks/>
-              </p:cNvPicPr>
-              <p:nvPr/>
-            </p:nvPicPr>
-            <p:blipFill>
-              <a:blip r:embed="rId24"/>
-              <a:stretch>
-                <a:fillRect/>
-              </a:stretch>
-            </p:blipFill>
-            <p:spPr>
-              <a:xfrm>
-                <a:off x="5649653" y="2432558"/>
-                <a:ext cx="71392" cy="45719"/>
-              </a:xfrm>
-              <a:prstGeom prst="rect">
-                <a:avLst/>
-              </a:prstGeom>
-            </p:spPr>
-          </p:pic>
-        </p:grpSp>
-        <p:grpSp>
-          <p:nvGrpSpPr>
-            <p:cNvPr id="92" name="Group 91">
-              <a:extLst>
-                <a:ext uri="{FF2B5EF4-FFF2-40B4-BE49-F238E27FC236}">
-                  <a16:creationId xmlns:a16="http://schemas.microsoft.com/office/drawing/2014/main" id="{6F1C36CF-532C-01B1-38AA-C06C7F74434E}"/>
-                </a:ext>
-              </a:extLst>
-            </p:cNvPr>
-            <p:cNvGrpSpPr/>
-            <p:nvPr/>
-          </p:nvGrpSpPr>
-          <p:grpSpPr>
-            <a:xfrm>
-              <a:off x="2755522" y="107940"/>
-              <a:ext cx="3066984" cy="2430376"/>
-              <a:chOff x="2755522" y="107940"/>
-              <a:chExt cx="3066984" cy="2430376"/>
-            </a:xfrm>
-          </p:grpSpPr>
-          <p:grpSp>
-            <p:nvGrpSpPr>
-              <p:cNvPr id="34" name="Group 33">
-                <a:extLst>
-                  <a:ext uri="{FF2B5EF4-FFF2-40B4-BE49-F238E27FC236}">
-                    <a16:creationId xmlns:a16="http://schemas.microsoft.com/office/drawing/2014/main" id="{85580EE2-F389-E7C1-B50F-17FD581CE4EB}"/>
-                  </a:ext>
-                </a:extLst>
-              </p:cNvPr>
-              <p:cNvGrpSpPr/>
-              <p:nvPr/>
-            </p:nvGrpSpPr>
-            <p:grpSpPr>
-              <a:xfrm>
-                <a:off x="5547987" y="281899"/>
-                <a:ext cx="274519" cy="2256417"/>
-                <a:chOff x="5593491" y="222050"/>
-                <a:chExt cx="274519" cy="2256417"/>
-              </a:xfrm>
-            </p:grpSpPr>
-            <p:sp>
-              <p:nvSpPr>
-                <p:cNvPr id="9" name="TextBox 8">
-                  <a:extLst>
-                    <a:ext uri="{FF2B5EF4-FFF2-40B4-BE49-F238E27FC236}">
-                      <a16:creationId xmlns:a16="http://schemas.microsoft.com/office/drawing/2014/main" id="{ACAEA614-DEDC-6131-548F-5668E9CCE3D7}"/>
-                    </a:ext>
-                  </a:extLst>
-                </p:cNvPr>
-                <p:cNvSpPr txBox="1"/>
-                <p:nvPr/>
-              </p:nvSpPr>
-              <p:spPr>
-                <a:xfrm>
-                  <a:off x="5595309" y="1110344"/>
-                  <a:ext cx="271055" cy="150811"/>
-                </a:xfrm>
-                <a:prstGeom prst="rect">
-                  <a:avLst/>
-                </a:prstGeom>
-                <a:noFill/>
-              </p:spPr>
-              <p:txBody>
-                <a:bodyPr wrap="square" rtlCol="0">
-                  <a:spAutoFit/>
-                </a:bodyPr>
-                <a:lstStyle/>
-                <a:p>
-                  <a:pPr algn="ctr"/>
-                  <a:r>
-                    <a:rPr lang="en-US" sz="350" b="1" dirty="0"/>
-                    <a:t>133</a:t>
-                  </a:r>
-                </a:p>
-              </p:txBody>
-            </p:sp>
-            <p:sp>
-              <p:nvSpPr>
-                <p:cNvPr id="14" name="TextBox 13">
-                  <a:extLst>
-                    <a:ext uri="{FF2B5EF4-FFF2-40B4-BE49-F238E27FC236}">
-                      <a16:creationId xmlns:a16="http://schemas.microsoft.com/office/drawing/2014/main" id="{B8E35E16-59DD-6CC0-680C-B4A309702F29}"/>
-                    </a:ext>
-                  </a:extLst>
-                </p:cNvPr>
-                <p:cNvSpPr txBox="1"/>
-                <p:nvPr/>
-              </p:nvSpPr>
-              <p:spPr>
-                <a:xfrm>
-                  <a:off x="5595309" y="222050"/>
-                  <a:ext cx="271055" cy="150811"/>
-                </a:xfrm>
-                <a:prstGeom prst="rect">
-                  <a:avLst/>
-                </a:prstGeom>
-                <a:noFill/>
-              </p:spPr>
-              <p:txBody>
-                <a:bodyPr wrap="square" rtlCol="0">
-                  <a:spAutoFit/>
-                </a:bodyPr>
-                <a:lstStyle/>
-                <a:p>
-                  <a:pPr algn="ctr"/>
-                  <a:r>
-                    <a:rPr lang="en-US" sz="380" b="1" dirty="0">
-                      <a:solidFill>
-                        <a:schemeClr val="bg1"/>
-                      </a:solidFill>
-                    </a:rPr>
-                    <a:t>40</a:t>
-                  </a:r>
-                </a:p>
-              </p:txBody>
-            </p:sp>
-            <p:sp>
-              <p:nvSpPr>
-                <p:cNvPr id="15" name="TextBox 14">
-                  <a:extLst>
-                    <a:ext uri="{FF2B5EF4-FFF2-40B4-BE49-F238E27FC236}">
-                      <a16:creationId xmlns:a16="http://schemas.microsoft.com/office/drawing/2014/main" id="{F339DDE8-4BD2-B6F1-1304-FD98F06E8518}"/>
-                    </a:ext>
-                  </a:extLst>
-                </p:cNvPr>
-                <p:cNvSpPr txBox="1"/>
-                <p:nvPr/>
-              </p:nvSpPr>
-              <p:spPr>
-                <a:xfrm>
-                  <a:off x="5595309" y="336825"/>
-                  <a:ext cx="271055" cy="150811"/>
-                </a:xfrm>
-                <a:prstGeom prst="rect">
-                  <a:avLst/>
-                </a:prstGeom>
-                <a:noFill/>
-              </p:spPr>
-              <p:txBody>
-                <a:bodyPr wrap="square" rtlCol="0">
-                  <a:spAutoFit/>
-                </a:bodyPr>
-                <a:lstStyle/>
-                <a:p>
-                  <a:pPr algn="ctr"/>
-                  <a:r>
-                    <a:rPr lang="en-US" sz="360" b="1" dirty="0"/>
-                    <a:t>111</a:t>
-                  </a:r>
-                </a:p>
-              </p:txBody>
-            </p:sp>
-            <p:sp>
-              <p:nvSpPr>
-                <p:cNvPr id="16" name="TextBox 15">
-                  <a:extLst>
-                    <a:ext uri="{FF2B5EF4-FFF2-40B4-BE49-F238E27FC236}">
-                      <a16:creationId xmlns:a16="http://schemas.microsoft.com/office/drawing/2014/main" id="{A0E7D684-3918-9F63-C07F-267D50BFAACA}"/>
-                    </a:ext>
-                  </a:extLst>
-                </p:cNvPr>
-                <p:cNvSpPr txBox="1"/>
-                <p:nvPr/>
-              </p:nvSpPr>
-              <p:spPr>
-                <a:xfrm>
-                  <a:off x="5595309" y="449557"/>
-                  <a:ext cx="271055" cy="150811"/>
-                </a:xfrm>
-                <a:prstGeom prst="rect">
-                  <a:avLst/>
-                </a:prstGeom>
-                <a:noFill/>
-              </p:spPr>
-              <p:txBody>
-                <a:bodyPr wrap="square" rtlCol="0">
-                  <a:spAutoFit/>
-                </a:bodyPr>
-                <a:lstStyle/>
-                <a:p>
-                  <a:pPr algn="ctr"/>
-                  <a:r>
-                    <a:rPr lang="en-US" sz="380" b="1" dirty="0">
-                      <a:solidFill>
-                        <a:schemeClr val="bg1"/>
-                      </a:solidFill>
-                    </a:rPr>
-                    <a:t>64</a:t>
-                  </a:r>
-                </a:p>
-              </p:txBody>
-            </p:sp>
-            <p:sp>
-              <p:nvSpPr>
-                <p:cNvPr id="17" name="TextBox 16">
-                  <a:extLst>
-                    <a:ext uri="{FF2B5EF4-FFF2-40B4-BE49-F238E27FC236}">
-                      <a16:creationId xmlns:a16="http://schemas.microsoft.com/office/drawing/2014/main" id="{F8567868-8981-3714-E4BC-BDB46C7053E0}"/>
-                    </a:ext>
-                  </a:extLst>
-                </p:cNvPr>
-                <p:cNvSpPr txBox="1"/>
-                <p:nvPr/>
-              </p:nvSpPr>
-              <p:spPr>
-                <a:xfrm>
-                  <a:off x="5595309" y="558074"/>
-                  <a:ext cx="271055" cy="150811"/>
-                </a:xfrm>
-                <a:prstGeom prst="rect">
-                  <a:avLst/>
-                </a:prstGeom>
-                <a:noFill/>
-              </p:spPr>
-              <p:txBody>
-                <a:bodyPr wrap="square" rtlCol="0">
-                  <a:spAutoFit/>
-                </a:bodyPr>
-                <a:lstStyle/>
-                <a:p>
-                  <a:pPr algn="ctr"/>
-                  <a:r>
-                    <a:rPr lang="en-US" sz="380" b="1" dirty="0">
-                      <a:solidFill>
-                        <a:schemeClr val="bg1"/>
-                      </a:solidFill>
-                    </a:rPr>
-                    <a:t>60</a:t>
-                  </a:r>
-                  <a:endParaRPr lang="en-US" sz="380" b="1" dirty="0"/>
-                </a:p>
-              </p:txBody>
-            </p:sp>
-            <p:sp>
-              <p:nvSpPr>
-                <p:cNvPr id="18" name="TextBox 17">
-                  <a:extLst>
-                    <a:ext uri="{FF2B5EF4-FFF2-40B4-BE49-F238E27FC236}">
-                      <a16:creationId xmlns:a16="http://schemas.microsoft.com/office/drawing/2014/main" id="{43FD98E3-19B4-F400-E907-E55685882669}"/>
-                    </a:ext>
-                  </a:extLst>
-                </p:cNvPr>
-                <p:cNvSpPr txBox="1"/>
-                <p:nvPr/>
-              </p:nvSpPr>
-              <p:spPr>
-                <a:xfrm>
-                  <a:off x="5595309" y="666677"/>
-                  <a:ext cx="271055" cy="150811"/>
-                </a:xfrm>
-                <a:prstGeom prst="rect">
-                  <a:avLst/>
-                </a:prstGeom>
-                <a:noFill/>
-              </p:spPr>
-              <p:txBody>
-                <a:bodyPr wrap="square" rtlCol="0">
-                  <a:spAutoFit/>
-                </a:bodyPr>
-                <a:lstStyle/>
-                <a:p>
-                  <a:pPr algn="ctr"/>
-                  <a:r>
-                    <a:rPr lang="en-US" sz="380" b="1" dirty="0">
-                      <a:solidFill>
-                        <a:schemeClr val="bg1"/>
-                      </a:solidFill>
-                    </a:rPr>
-                    <a:t>51</a:t>
-                  </a:r>
-                </a:p>
-              </p:txBody>
-            </p:sp>
-            <p:sp>
-              <p:nvSpPr>
-                <p:cNvPr id="19" name="TextBox 18">
-                  <a:extLst>
-                    <a:ext uri="{FF2B5EF4-FFF2-40B4-BE49-F238E27FC236}">
-                      <a16:creationId xmlns:a16="http://schemas.microsoft.com/office/drawing/2014/main" id="{94BDAAF8-25E9-217E-DFD7-ED608DAF07A0}"/>
-                    </a:ext>
-                  </a:extLst>
-                </p:cNvPr>
-                <p:cNvSpPr txBox="1"/>
-                <p:nvPr/>
-              </p:nvSpPr>
-              <p:spPr>
-                <a:xfrm>
-                  <a:off x="5595309" y="780146"/>
-                  <a:ext cx="271055" cy="150811"/>
-                </a:xfrm>
-                <a:prstGeom prst="rect">
-                  <a:avLst/>
-                </a:prstGeom>
-                <a:noFill/>
-              </p:spPr>
-              <p:txBody>
-                <a:bodyPr wrap="square" rtlCol="0">
-                  <a:spAutoFit/>
-                </a:bodyPr>
-                <a:lstStyle/>
-                <a:p>
-                  <a:pPr algn="ctr"/>
-                  <a:r>
-                    <a:rPr lang="en-US" sz="380" b="1" dirty="0">
-                      <a:solidFill>
-                        <a:schemeClr val="bg1"/>
-                      </a:solidFill>
-                    </a:rPr>
-                    <a:t>68</a:t>
-                  </a:r>
-                </a:p>
-              </p:txBody>
-            </p:sp>
-            <p:sp>
-              <p:nvSpPr>
-                <p:cNvPr id="20" name="TextBox 19">
-                  <a:extLst>
-                    <a:ext uri="{FF2B5EF4-FFF2-40B4-BE49-F238E27FC236}">
-                      <a16:creationId xmlns:a16="http://schemas.microsoft.com/office/drawing/2014/main" id="{28204371-7046-670C-4359-CC1BC6BF4542}"/>
-                    </a:ext>
-                  </a:extLst>
-                </p:cNvPr>
-                <p:cNvSpPr txBox="1"/>
-                <p:nvPr/>
-              </p:nvSpPr>
-              <p:spPr>
-                <a:xfrm>
-                  <a:off x="5595309" y="891269"/>
-                  <a:ext cx="271055" cy="150811"/>
-                </a:xfrm>
-                <a:prstGeom prst="rect">
-                  <a:avLst/>
-                </a:prstGeom>
-                <a:noFill/>
-              </p:spPr>
-              <p:txBody>
-                <a:bodyPr wrap="square" rtlCol="0">
-                  <a:spAutoFit/>
-                </a:bodyPr>
-                <a:lstStyle/>
-                <a:p>
-                  <a:pPr algn="ctr"/>
-                  <a:r>
-                    <a:rPr lang="en-US" sz="360" b="1" dirty="0"/>
-                    <a:t>126</a:t>
-                  </a:r>
-                </a:p>
-              </p:txBody>
-            </p:sp>
-            <p:sp>
-              <p:nvSpPr>
-                <p:cNvPr id="21" name="TextBox 20">
-                  <a:extLst>
-                    <a:ext uri="{FF2B5EF4-FFF2-40B4-BE49-F238E27FC236}">
-                      <a16:creationId xmlns:a16="http://schemas.microsoft.com/office/drawing/2014/main" id="{DA88B3C1-03C7-8827-3B1B-5FFD22040B21}"/>
-                    </a:ext>
-                  </a:extLst>
-                </p:cNvPr>
-                <p:cNvSpPr txBox="1"/>
-                <p:nvPr/>
-              </p:nvSpPr>
-              <p:spPr>
-                <a:xfrm>
-                  <a:off x="5595309" y="1002394"/>
-                  <a:ext cx="271055" cy="147733"/>
-                </a:xfrm>
-                <a:prstGeom prst="rect">
-                  <a:avLst/>
-                </a:prstGeom>
-                <a:noFill/>
-              </p:spPr>
-              <p:txBody>
-                <a:bodyPr wrap="square" rtlCol="0">
-                  <a:spAutoFit/>
-                </a:bodyPr>
-                <a:lstStyle/>
-                <a:p>
-                  <a:pPr algn="ctr"/>
-                  <a:r>
-                    <a:rPr lang="en-US" sz="360" b="1" dirty="0"/>
-                    <a:t>170</a:t>
-                  </a:r>
-                </a:p>
-              </p:txBody>
-            </p:sp>
-            <p:sp>
-              <p:nvSpPr>
-                <p:cNvPr id="22" name="TextBox 21">
-                  <a:extLst>
-                    <a:ext uri="{FF2B5EF4-FFF2-40B4-BE49-F238E27FC236}">
-                      <a16:creationId xmlns:a16="http://schemas.microsoft.com/office/drawing/2014/main" id="{3CF09BB3-3240-FEC1-626C-EEBC93BFD58C}"/>
-                    </a:ext>
-                  </a:extLst>
-                </p:cNvPr>
-                <p:cNvSpPr txBox="1"/>
-                <p:nvPr/>
-              </p:nvSpPr>
-              <p:spPr>
-                <a:xfrm>
-                  <a:off x="5595309" y="1221469"/>
-                  <a:ext cx="271055" cy="150811"/>
-                </a:xfrm>
-                <a:prstGeom prst="rect">
-                  <a:avLst/>
-                </a:prstGeom>
-                <a:noFill/>
-              </p:spPr>
-              <p:txBody>
-                <a:bodyPr wrap="square" rtlCol="0">
-                  <a:spAutoFit/>
-                </a:bodyPr>
-                <a:lstStyle/>
-                <a:p>
-                  <a:pPr algn="ctr"/>
-                  <a:r>
-                    <a:rPr lang="en-US" sz="350" b="1" dirty="0"/>
-                    <a:t>120</a:t>
-                  </a:r>
-                </a:p>
-              </p:txBody>
-            </p:sp>
-            <p:sp>
-              <p:nvSpPr>
-                <p:cNvPr id="23" name="TextBox 22">
-                  <a:extLst>
-                    <a:ext uri="{FF2B5EF4-FFF2-40B4-BE49-F238E27FC236}">
-                      <a16:creationId xmlns:a16="http://schemas.microsoft.com/office/drawing/2014/main" id="{3ACCB3C2-5A0B-6550-1096-1D06A4177BC1}"/>
-                    </a:ext>
-                  </a:extLst>
-                </p:cNvPr>
-                <p:cNvSpPr txBox="1"/>
-                <p:nvPr/>
-              </p:nvSpPr>
-              <p:spPr>
-                <a:xfrm>
-                  <a:off x="5595309" y="1332594"/>
-                  <a:ext cx="271055" cy="150811"/>
-                </a:xfrm>
-                <a:prstGeom prst="rect">
-                  <a:avLst/>
-                </a:prstGeom>
-                <a:noFill/>
-              </p:spPr>
-              <p:txBody>
-                <a:bodyPr wrap="square" rtlCol="0">
-                  <a:spAutoFit/>
-                </a:bodyPr>
-                <a:lstStyle/>
-                <a:p>
-                  <a:pPr algn="ctr"/>
-                  <a:r>
-                    <a:rPr lang="en-US" sz="350" b="1" dirty="0"/>
-                    <a:t>103</a:t>
-                  </a:r>
-                </a:p>
-              </p:txBody>
-            </p:sp>
-            <p:sp>
-              <p:nvSpPr>
-                <p:cNvPr id="24" name="TextBox 23">
-                  <a:extLst>
-                    <a:ext uri="{FF2B5EF4-FFF2-40B4-BE49-F238E27FC236}">
-                      <a16:creationId xmlns:a16="http://schemas.microsoft.com/office/drawing/2014/main" id="{39AE70BE-5303-F179-FF33-B9E755DB15E9}"/>
-                    </a:ext>
-                  </a:extLst>
-                </p:cNvPr>
-                <p:cNvSpPr txBox="1"/>
-                <p:nvPr/>
-              </p:nvSpPr>
-              <p:spPr>
-                <a:xfrm>
-                  <a:off x="5594400" y="1443719"/>
-                  <a:ext cx="271055" cy="150811"/>
-                </a:xfrm>
-                <a:prstGeom prst="rect">
-                  <a:avLst/>
-                </a:prstGeom>
-                <a:noFill/>
-              </p:spPr>
-              <p:txBody>
-                <a:bodyPr wrap="square" rtlCol="0">
-                  <a:spAutoFit/>
-                </a:bodyPr>
-                <a:lstStyle/>
-                <a:p>
-                  <a:pPr algn="ctr"/>
-                  <a:r>
-                    <a:rPr lang="en-US" sz="350" b="1" dirty="0"/>
-                    <a:t>175</a:t>
-                  </a:r>
-                </a:p>
-              </p:txBody>
-            </p:sp>
-            <p:sp>
-              <p:nvSpPr>
-                <p:cNvPr id="25" name="TextBox 24">
-                  <a:extLst>
-                    <a:ext uri="{FF2B5EF4-FFF2-40B4-BE49-F238E27FC236}">
-                      <a16:creationId xmlns:a16="http://schemas.microsoft.com/office/drawing/2014/main" id="{47BA567E-519E-868C-E73D-974512AB7AFD}"/>
-                    </a:ext>
-                  </a:extLst>
-                </p:cNvPr>
-                <p:cNvSpPr txBox="1"/>
-                <p:nvPr/>
-              </p:nvSpPr>
-              <p:spPr>
-                <a:xfrm>
-                  <a:off x="5593491" y="1552956"/>
-                  <a:ext cx="271055" cy="150811"/>
-                </a:xfrm>
-                <a:prstGeom prst="rect">
-                  <a:avLst/>
-                </a:prstGeom>
-                <a:noFill/>
-              </p:spPr>
-              <p:txBody>
-                <a:bodyPr wrap="square" rtlCol="0">
-                  <a:spAutoFit/>
-                </a:bodyPr>
-                <a:lstStyle/>
-                <a:p>
-                  <a:pPr algn="ctr"/>
-                  <a:r>
-                    <a:rPr lang="en-US" sz="350" b="1" dirty="0"/>
-                    <a:t>150</a:t>
-                  </a:r>
-                </a:p>
-              </p:txBody>
-            </p:sp>
-            <p:sp>
-              <p:nvSpPr>
-                <p:cNvPr id="26" name="TextBox 25">
-                  <a:extLst>
-                    <a:ext uri="{FF2B5EF4-FFF2-40B4-BE49-F238E27FC236}">
-                      <a16:creationId xmlns:a16="http://schemas.microsoft.com/office/drawing/2014/main" id="{AF5E2385-88E8-7E5A-29D7-147B8C86E90B}"/>
-                    </a:ext>
-                  </a:extLst>
-                </p:cNvPr>
-                <p:cNvSpPr txBox="1"/>
-                <p:nvPr/>
-              </p:nvSpPr>
-              <p:spPr>
-                <a:xfrm>
-                  <a:off x="5596955" y="1663407"/>
-                  <a:ext cx="271055" cy="150811"/>
-                </a:xfrm>
-                <a:prstGeom prst="rect">
-                  <a:avLst/>
-                </a:prstGeom>
-                <a:noFill/>
-              </p:spPr>
-              <p:txBody>
-                <a:bodyPr wrap="square" rtlCol="0">
-                  <a:spAutoFit/>
-                </a:bodyPr>
-                <a:lstStyle/>
-                <a:p>
-                  <a:pPr algn="ctr"/>
-                  <a:r>
-                    <a:rPr lang="en-US" sz="350" b="1" dirty="0">
-                      <a:solidFill>
-                        <a:schemeClr val="bg1"/>
-                      </a:solidFill>
-                    </a:rPr>
-                    <a:t>210</a:t>
-                  </a:r>
-                </a:p>
-              </p:txBody>
-            </p:sp>
-            <p:sp>
-              <p:nvSpPr>
-                <p:cNvPr id="27" name="TextBox 26">
-                  <a:extLst>
-                    <a:ext uri="{FF2B5EF4-FFF2-40B4-BE49-F238E27FC236}">
-                      <a16:creationId xmlns:a16="http://schemas.microsoft.com/office/drawing/2014/main" id="{2CD6035E-E71B-D108-F78F-01548087FDF0}"/>
-                    </a:ext>
-                  </a:extLst>
-                </p:cNvPr>
-                <p:cNvSpPr txBox="1"/>
-                <p:nvPr/>
-              </p:nvSpPr>
-              <p:spPr>
-                <a:xfrm>
-                  <a:off x="5596955" y="1775206"/>
-                  <a:ext cx="271055" cy="150811"/>
-                </a:xfrm>
-                <a:prstGeom prst="rect">
-                  <a:avLst/>
-                </a:prstGeom>
-                <a:noFill/>
-              </p:spPr>
-              <p:txBody>
-                <a:bodyPr wrap="square" rtlCol="0">
-                  <a:spAutoFit/>
-                </a:bodyPr>
-                <a:lstStyle/>
-                <a:p>
-                  <a:pPr algn="ctr"/>
-                  <a:r>
-                    <a:rPr lang="en-US" sz="350" b="1" dirty="0">
-                      <a:solidFill>
-                        <a:schemeClr val="bg1"/>
-                      </a:solidFill>
-                    </a:rPr>
-                    <a:t>244</a:t>
-                  </a:r>
-                </a:p>
-              </p:txBody>
-            </p:sp>
-            <p:sp>
-              <p:nvSpPr>
-                <p:cNvPr id="28" name="TextBox 27">
-                  <a:extLst>
-                    <a:ext uri="{FF2B5EF4-FFF2-40B4-BE49-F238E27FC236}">
-                      <a16:creationId xmlns:a16="http://schemas.microsoft.com/office/drawing/2014/main" id="{A9F2C955-C8C7-D681-B7E8-7AE9733E9462}"/>
-                    </a:ext>
-                  </a:extLst>
-                </p:cNvPr>
-                <p:cNvSpPr txBox="1"/>
-                <p:nvPr/>
-              </p:nvSpPr>
-              <p:spPr>
-                <a:xfrm>
-                  <a:off x="5596955" y="1886331"/>
-                  <a:ext cx="271055" cy="150811"/>
-                </a:xfrm>
-                <a:prstGeom prst="rect">
-                  <a:avLst/>
-                </a:prstGeom>
-                <a:noFill/>
-              </p:spPr>
-              <p:txBody>
-                <a:bodyPr wrap="square" rtlCol="0">
-                  <a:spAutoFit/>
-                </a:bodyPr>
-                <a:lstStyle/>
-                <a:p>
-                  <a:pPr algn="ctr"/>
-                  <a:r>
-                    <a:rPr lang="en-US" sz="350" b="1" dirty="0">
-                      <a:solidFill>
-                        <a:schemeClr val="bg1"/>
-                      </a:solidFill>
-                    </a:rPr>
-                    <a:t>238</a:t>
-                  </a:r>
-                </a:p>
-              </p:txBody>
-            </p:sp>
-            <p:sp>
-              <p:nvSpPr>
-                <p:cNvPr id="29" name="TextBox 28">
-                  <a:extLst>
-                    <a:ext uri="{FF2B5EF4-FFF2-40B4-BE49-F238E27FC236}">
-                      <a16:creationId xmlns:a16="http://schemas.microsoft.com/office/drawing/2014/main" id="{AA1A5301-1C1D-7B56-2D6B-FFA62607E409}"/>
-                    </a:ext>
-                  </a:extLst>
-                </p:cNvPr>
-                <p:cNvSpPr txBox="1"/>
-                <p:nvPr/>
-              </p:nvSpPr>
-              <p:spPr>
-                <a:xfrm>
-                  <a:off x="5596955" y="1994281"/>
-                  <a:ext cx="271055" cy="150811"/>
-                </a:xfrm>
-                <a:prstGeom prst="rect">
-                  <a:avLst/>
-                </a:prstGeom>
-                <a:noFill/>
-              </p:spPr>
-              <p:txBody>
-                <a:bodyPr wrap="square" rtlCol="0">
-                  <a:spAutoFit/>
-                </a:bodyPr>
-                <a:lstStyle/>
-                <a:p>
-                  <a:pPr algn="ctr"/>
-                  <a:r>
-                    <a:rPr lang="en-US" sz="350" b="1" dirty="0">
-                      <a:solidFill>
-                        <a:schemeClr val="bg1"/>
-                      </a:solidFill>
-                    </a:rPr>
-                    <a:t>220</a:t>
-                  </a:r>
-                </a:p>
-              </p:txBody>
-            </p:sp>
-            <p:sp>
-              <p:nvSpPr>
-                <p:cNvPr id="30" name="TextBox 29">
-                  <a:extLst>
-                    <a:ext uri="{FF2B5EF4-FFF2-40B4-BE49-F238E27FC236}">
-                      <a16:creationId xmlns:a16="http://schemas.microsoft.com/office/drawing/2014/main" id="{D5AAC2E4-C046-5311-567E-A5A87291B9AF}"/>
-                    </a:ext>
-                  </a:extLst>
-                </p:cNvPr>
-                <p:cNvSpPr txBox="1"/>
-                <p:nvPr/>
-              </p:nvSpPr>
-              <p:spPr>
-                <a:xfrm>
-                  <a:off x="5596955" y="2105406"/>
-                  <a:ext cx="271055" cy="150811"/>
-                </a:xfrm>
-                <a:prstGeom prst="rect">
-                  <a:avLst/>
-                </a:prstGeom>
-                <a:noFill/>
-              </p:spPr>
-              <p:txBody>
-                <a:bodyPr wrap="square" rtlCol="0">
-                  <a:spAutoFit/>
-                </a:bodyPr>
-                <a:lstStyle/>
-                <a:p>
-                  <a:pPr algn="ctr"/>
-                  <a:r>
-                    <a:rPr lang="en-US" sz="350" b="1" dirty="0">
-                      <a:solidFill>
-                        <a:schemeClr val="bg1"/>
-                      </a:solidFill>
-                    </a:rPr>
-                    <a:t>209</a:t>
-                  </a:r>
-                </a:p>
-              </p:txBody>
-            </p:sp>
-            <p:sp>
-              <p:nvSpPr>
-                <p:cNvPr id="32" name="TextBox 31">
-                  <a:extLst>
-                    <a:ext uri="{FF2B5EF4-FFF2-40B4-BE49-F238E27FC236}">
-                      <a16:creationId xmlns:a16="http://schemas.microsoft.com/office/drawing/2014/main" id="{BD687395-05F2-7350-E51F-C65E3BE0E7F1}"/>
-                    </a:ext>
-                  </a:extLst>
-                </p:cNvPr>
-                <p:cNvSpPr txBox="1"/>
-                <p:nvPr/>
-              </p:nvSpPr>
-              <p:spPr>
-                <a:xfrm>
-                  <a:off x="5596955" y="2327656"/>
-                  <a:ext cx="271055" cy="150811"/>
-                </a:xfrm>
-                <a:prstGeom prst="rect">
-                  <a:avLst/>
-                </a:prstGeom>
-                <a:noFill/>
-              </p:spPr>
-              <p:txBody>
-                <a:bodyPr wrap="square" rtlCol="0">
-                  <a:spAutoFit/>
-                </a:bodyPr>
-                <a:lstStyle/>
-                <a:p>
-                  <a:pPr algn="ctr"/>
-                  <a:r>
-                    <a:rPr lang="en-US" sz="350" b="1" dirty="0">
-                      <a:solidFill>
-                        <a:schemeClr val="bg1"/>
-                      </a:solidFill>
-                    </a:rPr>
-                    <a:t>254</a:t>
-                  </a:r>
-                </a:p>
-              </p:txBody>
-            </p:sp>
-            <p:sp>
-              <p:nvSpPr>
-                <p:cNvPr id="31" name="TextBox 30">
-                  <a:extLst>
-                    <a:ext uri="{FF2B5EF4-FFF2-40B4-BE49-F238E27FC236}">
-                      <a16:creationId xmlns:a16="http://schemas.microsoft.com/office/drawing/2014/main" id="{CD5304C3-D5A6-ED47-EF8C-E3B25CF46DCE}"/>
-                    </a:ext>
-                  </a:extLst>
-                </p:cNvPr>
-                <p:cNvSpPr txBox="1"/>
-                <p:nvPr/>
-              </p:nvSpPr>
-              <p:spPr>
-                <a:xfrm>
-                  <a:off x="5596955" y="2216531"/>
-                  <a:ext cx="271055" cy="150811"/>
-                </a:xfrm>
-                <a:prstGeom prst="rect">
-                  <a:avLst/>
-                </a:prstGeom>
-                <a:noFill/>
-              </p:spPr>
-              <p:txBody>
-                <a:bodyPr wrap="square" rtlCol="0">
-                  <a:spAutoFit/>
-                </a:bodyPr>
-                <a:lstStyle/>
-                <a:p>
-                  <a:pPr algn="ctr"/>
-                  <a:r>
-                    <a:rPr lang="en-US" sz="350" b="1" dirty="0">
-                      <a:solidFill>
-                        <a:schemeClr val="bg1"/>
-                      </a:solidFill>
-                    </a:rPr>
-                    <a:t>238</a:t>
-                  </a:r>
-                </a:p>
-              </p:txBody>
-            </p:sp>
-          </p:grpSp>
-          <p:sp>
-            <p:nvSpPr>
-              <p:cNvPr id="8" name="TextBox 7">
-                <a:extLst>
-                  <a:ext uri="{FF2B5EF4-FFF2-40B4-BE49-F238E27FC236}">
-                    <a16:creationId xmlns:a16="http://schemas.microsoft.com/office/drawing/2014/main" id="{648DB802-9937-05B3-D97E-CE6AB5C65128}"/>
-                  </a:ext>
-                </a:extLst>
-              </p:cNvPr>
-              <p:cNvSpPr txBox="1"/>
-              <p:nvPr/>
-            </p:nvSpPr>
-            <p:spPr>
-              <a:xfrm>
-                <a:off x="2755522" y="107940"/>
-                <a:ext cx="229573" cy="246221"/>
-              </a:xfrm>
-              <a:prstGeom prst="rect">
-                <a:avLst/>
-              </a:prstGeom>
-              <a:noFill/>
-            </p:spPr>
-            <p:txBody>
-              <a:bodyPr wrap="square" rtlCol="0">
-                <a:spAutoFit/>
-              </a:bodyPr>
-              <a:lstStyle/>
-              <a:p>
-                <a:r>
-                  <a:rPr lang="en-US" sz="1000" b="1" dirty="0"/>
-                  <a:t>a</a:t>
-                </a:r>
-              </a:p>
-            </p:txBody>
-          </p:sp>
-        </p:grpSp>
-      </p:grpSp>
       <p:sp>
         <p:nvSpPr>
           <p:cNvPr id="7" name="TextBox 6">
@@ -5296,283 +3483,45 @@
       </p:sp>
       <p:sp>
         <p:nvSpPr>
-          <p:cNvPr id="38" name="Rectangle 37">
+          <p:cNvPr id="6" name="TextBox 5">
             <a:extLst>
               <a:ext uri="{FF2B5EF4-FFF2-40B4-BE49-F238E27FC236}">
-                <a16:creationId xmlns:a16="http://schemas.microsoft.com/office/drawing/2014/main" id="{21F5E0B7-B60F-E90F-E70C-245BCB81090F}"/>
+                <a16:creationId xmlns:a16="http://schemas.microsoft.com/office/drawing/2014/main" id="{63D8B043-E752-7C25-6CC3-DDA7C5FC7848}"/>
               </a:ext>
             </a:extLst>
           </p:cNvPr>
-          <p:cNvSpPr/>
+          <p:cNvSpPr txBox="1"/>
           <p:nvPr/>
         </p:nvSpPr>
         <p:spPr>
           <a:xfrm>
-            <a:off x="3119411" y="2109107"/>
-            <a:ext cx="312432" cy="153472"/>
+            <a:off x="105472" y="77855"/>
+            <a:ext cx="229573" cy="246221"/>
           </a:xfrm>
           <a:prstGeom prst="rect">
             <a:avLst/>
           </a:prstGeom>
-          <a:solidFill>
-            <a:schemeClr val="bg1"/>
-          </a:solidFill>
-          <a:ln>
-            <a:noFill/>
-          </a:ln>
+          <a:noFill/>
         </p:spPr>
-        <p:style>
-          <a:lnRef idx="2">
-            <a:schemeClr val="accent1">
-              <a:shade val="15000"/>
-            </a:schemeClr>
-          </a:lnRef>
-          <a:fillRef idx="1">
-            <a:schemeClr val="accent1"/>
-          </a:fillRef>
-          <a:effectRef idx="0">
-            <a:schemeClr val="accent1"/>
-          </a:effectRef>
-          <a:fontRef idx="minor">
-            <a:schemeClr val="lt1"/>
-          </a:fontRef>
-        </p:style>
-        <p:txBody>
-          <a:bodyPr rtlCol="0" anchor="ctr"/>
-          <a:lstStyle/>
-          <a:p>
-            <a:pPr algn="ctr"/>
-            <a:endParaRPr lang="en-US"/>
-          </a:p>
-        </p:txBody>
-      </p:sp>
-      <p:grpSp>
-        <p:nvGrpSpPr>
-          <p:cNvPr id="2" name="Group 1">
+        <p:txBody>
+          <a:bodyPr wrap="square" rtlCol="0">
+            <a:spAutoFit/>
+          </a:bodyPr>
+          <a:lstStyle/>
+          <a:p>
+            <a:r>
+              <a:rPr lang="en-US" sz="1000" b="1" dirty="0"/>
+              <a:t>a</a:t>
+            </a:r>
+          </a:p>
+        </p:txBody>
+      </p:sp>
+      <p:pic>
+        <p:nvPicPr>
+          <p:cNvPr id="41" name="Picture 40">
             <a:extLst>
               <a:ext uri="{FF2B5EF4-FFF2-40B4-BE49-F238E27FC236}">
-                <a16:creationId xmlns:a16="http://schemas.microsoft.com/office/drawing/2014/main" id="{43352476-737E-17AD-1582-59571A573B32}"/>
-              </a:ext>
-            </a:extLst>
-          </p:cNvPr>
-          <p:cNvGrpSpPr>
-            <a:grpSpLocks noChangeAspect="1"/>
-          </p:cNvGrpSpPr>
-          <p:nvPr/>
-        </p:nvGrpSpPr>
-        <p:grpSpPr>
-          <a:xfrm>
-            <a:off x="3114118" y="2157709"/>
-            <a:ext cx="196947" cy="86388"/>
-            <a:chOff x="1922462" y="512365"/>
-            <a:chExt cx="1047751" cy="459582"/>
-          </a:xfrm>
-        </p:grpSpPr>
-        <p:pic>
-          <p:nvPicPr>
-            <p:cNvPr id="4" name="Picture 3" descr="A black text on a white background&#10;&#10;AI-generated content may be incorrect.">
-              <a:extLst>
-                <a:ext uri="{FF2B5EF4-FFF2-40B4-BE49-F238E27FC236}">
-                  <a16:creationId xmlns:a16="http://schemas.microsoft.com/office/drawing/2014/main" id="{0DA43D7F-8147-5150-EEFB-FE66EFAB1BD1}"/>
-                </a:ext>
-              </a:extLst>
-            </p:cNvPr>
-            <p:cNvPicPr>
-              <a:picLocks noChangeAspect="1"/>
-            </p:cNvPicPr>
-            <p:nvPr/>
-          </p:nvPicPr>
-          <p:blipFill>
-            <a:blip r:embed="rId25"/>
-            <a:srcRect t="14792" r="1136"/>
-            <a:stretch/>
-          </p:blipFill>
-          <p:spPr>
-            <a:xfrm>
-              <a:off x="1922462" y="647303"/>
-              <a:ext cx="414338" cy="324644"/>
-            </a:xfrm>
-            <a:prstGeom prst="rect">
-              <a:avLst/>
-            </a:prstGeom>
-          </p:spPr>
-        </p:pic>
-        <p:pic>
-          <p:nvPicPr>
-            <p:cNvPr id="5" name="Picture 4">
-              <a:extLst>
-                <a:ext uri="{FF2B5EF4-FFF2-40B4-BE49-F238E27FC236}">
-                  <a16:creationId xmlns:a16="http://schemas.microsoft.com/office/drawing/2014/main" id="{9FC01F92-7CD1-86B4-6082-F56687B32620}"/>
-                </a:ext>
-              </a:extLst>
-            </p:cNvPr>
-            <p:cNvPicPr>
-              <a:picLocks noChangeAspect="1"/>
-            </p:cNvPicPr>
-            <p:nvPr/>
-          </p:nvPicPr>
-          <p:blipFill>
-            <a:blip r:embed="rId26"/>
-            <a:srcRect l="20140" t="26458" r="3471" b="12708"/>
-            <a:stretch/>
-          </p:blipFill>
-          <p:spPr>
-            <a:xfrm>
-              <a:off x="2333625" y="646113"/>
-              <a:ext cx="174625" cy="231775"/>
-            </a:xfrm>
-            <a:prstGeom prst="rect">
-              <a:avLst/>
-            </a:prstGeom>
-          </p:spPr>
-        </p:pic>
-        <p:pic>
-          <p:nvPicPr>
-            <p:cNvPr id="10" name="Picture 9">
-              <a:extLst>
-                <a:ext uri="{FF2B5EF4-FFF2-40B4-BE49-F238E27FC236}">
-                  <a16:creationId xmlns:a16="http://schemas.microsoft.com/office/drawing/2014/main" id="{36E715A7-61E3-3512-0E0F-BD4381F34393}"/>
-                </a:ext>
-              </a:extLst>
-            </p:cNvPr>
-            <p:cNvPicPr>
-              <a:picLocks noChangeAspect="1"/>
-            </p:cNvPicPr>
-            <p:nvPr/>
-          </p:nvPicPr>
-          <p:blipFill>
-            <a:blip r:embed="rId27"/>
-            <a:srcRect l="10939" t="9793" r="26561" b="12917"/>
-            <a:stretch/>
-          </p:blipFill>
-          <p:spPr>
-            <a:xfrm>
-              <a:off x="2673350" y="605234"/>
-              <a:ext cx="63500" cy="294481"/>
-            </a:xfrm>
-            <a:prstGeom prst="rect">
-              <a:avLst/>
-            </a:prstGeom>
-          </p:spPr>
-        </p:pic>
-        <p:pic>
-          <p:nvPicPr>
-            <p:cNvPr id="11" name="Picture 10">
-              <a:extLst>
-                <a:ext uri="{FF2B5EF4-FFF2-40B4-BE49-F238E27FC236}">
-                  <a16:creationId xmlns:a16="http://schemas.microsoft.com/office/drawing/2014/main" id="{F16F3FE3-D211-B69A-4735-F306FFD7DC5C}"/>
-                </a:ext>
-              </a:extLst>
-            </p:cNvPr>
-            <p:cNvPicPr>
-              <a:picLocks noChangeAspect="1"/>
-            </p:cNvPicPr>
-            <p:nvPr/>
-          </p:nvPicPr>
-          <p:blipFill>
-            <a:blip r:embed="rId28"/>
-            <a:stretch>
-              <a:fillRect/>
-            </a:stretch>
-          </p:blipFill>
-          <p:spPr>
-            <a:xfrm>
-              <a:off x="2741613" y="512365"/>
-              <a:ext cx="228600" cy="381000"/>
-            </a:xfrm>
-            <a:prstGeom prst="rect">
-              <a:avLst/>
-            </a:prstGeom>
-          </p:spPr>
-        </p:pic>
-        <p:pic>
-          <p:nvPicPr>
-            <p:cNvPr id="12" name="Picture 11">
-              <a:extLst>
-                <a:ext uri="{FF2B5EF4-FFF2-40B4-BE49-F238E27FC236}">
-                  <a16:creationId xmlns:a16="http://schemas.microsoft.com/office/drawing/2014/main" id="{A1E596C5-35FB-32DC-E1DC-62F2AB109E55}"/>
-                </a:ext>
-              </a:extLst>
-            </p:cNvPr>
-            <p:cNvPicPr>
-              <a:picLocks noChangeAspect="1"/>
-            </p:cNvPicPr>
-            <p:nvPr/>
-          </p:nvPicPr>
-          <p:blipFill>
-            <a:blip r:embed="rId26"/>
-            <a:srcRect l="20140" t="26458" r="3471" b="12708"/>
-            <a:stretch/>
-          </p:blipFill>
-          <p:spPr>
-            <a:xfrm>
-              <a:off x="2508250" y="646113"/>
-              <a:ext cx="174625" cy="231775"/>
-            </a:xfrm>
-            <a:prstGeom prst="rect">
-              <a:avLst/>
-            </a:prstGeom>
-          </p:spPr>
-        </p:pic>
-        <p:sp>
-          <p:nvSpPr>
-            <p:cNvPr id="13" name="Rectangle 12">
-              <a:extLst>
-                <a:ext uri="{FF2B5EF4-FFF2-40B4-BE49-F238E27FC236}">
-                  <a16:creationId xmlns:a16="http://schemas.microsoft.com/office/drawing/2014/main" id="{8B93C6C2-79D4-11D9-8E24-E8A5C6525EB5}"/>
-                </a:ext>
-              </a:extLst>
-            </p:cNvPr>
-            <p:cNvSpPr/>
-            <p:nvPr/>
-          </p:nvSpPr>
-          <p:spPr>
-            <a:xfrm flipH="1">
-              <a:off x="2282825" y="646113"/>
-              <a:ext cx="57150" cy="78978"/>
-            </a:xfrm>
-            <a:prstGeom prst="rect">
-              <a:avLst/>
-            </a:prstGeom>
-            <a:solidFill>
-              <a:schemeClr val="bg1"/>
-            </a:solidFill>
-            <a:ln>
-              <a:noFill/>
-            </a:ln>
-          </p:spPr>
-          <p:style>
-            <a:lnRef idx="2">
-              <a:schemeClr val="accent1">
-                <a:shade val="15000"/>
-              </a:schemeClr>
-            </a:lnRef>
-            <a:fillRef idx="1">
-              <a:schemeClr val="accent1"/>
-            </a:fillRef>
-            <a:effectRef idx="0">
-              <a:schemeClr val="accent1"/>
-            </a:effectRef>
-            <a:fontRef idx="minor">
-              <a:schemeClr val="lt1"/>
-            </a:fontRef>
-          </p:style>
-          <p:txBody>
-            <a:bodyPr rtlCol="0" anchor="ctr"/>
-            <a:lstStyle/>
-            <a:p>
-              <a:pPr algn="ctr"/>
-              <a:endParaRPr lang="en-US"/>
-            </a:p>
-          </p:txBody>
-        </p:sp>
-      </p:grpSp>
-      <p:pic>
-        <p:nvPicPr>
-          <p:cNvPr id="51" name="Picture 50" descr="A black background with a black square&#10;&#10;AI-generated content may be incorrect.">
-            <a:extLst>
-              <a:ext uri="{FF2B5EF4-FFF2-40B4-BE49-F238E27FC236}">
-                <a16:creationId xmlns:a16="http://schemas.microsoft.com/office/drawing/2014/main" id="{57D0CC11-132E-772B-2FFC-46250156C93C}"/>
+                <a16:creationId xmlns:a16="http://schemas.microsoft.com/office/drawing/2014/main" id="{1B6CBD33-0B79-1433-C28F-665FCF5F9C1B}"/>
               </a:ext>
             </a:extLst>
           </p:cNvPr>
@@ -5582,15 +3531,14 @@
           <p:nvPr/>
         </p:nvPicPr>
         <p:blipFill>
-          <a:blip r:embed="rId29"/>
-          <a:stretch>
-            <a:fillRect/>
-          </a:stretch>
+          <a:blip r:embed="rId4"/>
+          <a:srcRect/>
+          <a:stretch/>
         </p:blipFill>
         <p:spPr>
           <a:xfrm>
-            <a:off x="3321500" y="2149243"/>
-            <a:ext cx="152277" cy="129872"/>
+            <a:off x="58724" y="289420"/>
+            <a:ext cx="3636628" cy="2171827"/>
           </a:xfrm>
           <a:prstGeom prst="rect">
             <a:avLst/>
